--- a/Assignment_Post_Training/Mummana_Venkatesh/Snowflake_Cortex_Search_RAG_Project.pptx
+++ b/Assignment_Post_Training/Mummana_Venkatesh/Snowflake_Cortex_Search_RAG_Project.pptx
@@ -11,8 +11,10 @@
     <p:sldId id="259" r:id="rId5"/>
     <p:sldId id="260" r:id="rId6"/>
     <p:sldId id="261" r:id="rId7"/>
-    <p:sldId id="262" r:id="rId8"/>
-    <p:sldId id="264" r:id="rId9"/>
+    <p:sldId id="265" r:id="rId8"/>
+    <p:sldId id="266" r:id="rId9"/>
+    <p:sldId id="262" r:id="rId10"/>
+    <p:sldId id="264" r:id="rId11"/>
   </p:sldIdLst>
   <p:sldSz cx="12192000" cy="6858000"/>
   <p:notesSz cx="6858000" cy="9144000"/>
@@ -269,7 +271,7 @@
           <a:p>
             <a:fld id="{5BCAD085-E8A6-8845-BD4E-CB4CCA059FC4}" type="datetimeFigureOut">
               <a:rPr lang="en-US" smtClean="0"/>
-              <a:t>10/17/2026</a:t>
+              <a:t>10/21/2026</a:t>
             </a:fld>
             <a:endParaRPr lang="en-US"/>
           </a:p>
@@ -480,7 +482,7 @@
           <a:p>
             <a:fld id="{5BCAD085-E8A6-8845-BD4E-CB4CCA059FC4}" type="datetimeFigureOut">
               <a:rPr lang="en-US" smtClean="0"/>
-              <a:t>10/17/2026</a:t>
+              <a:t>10/21/2026</a:t>
             </a:fld>
             <a:endParaRPr lang="en-US"/>
           </a:p>
@@ -695,7 +697,7 @@
           <a:p>
             <a:fld id="{5BCAD085-E8A6-8845-BD4E-CB4CCA059FC4}" type="datetimeFigureOut">
               <a:rPr lang="en-US" smtClean="0"/>
-              <a:t>10/17/2026</a:t>
+              <a:t>10/21/2026</a:t>
             </a:fld>
             <a:endParaRPr lang="en-US"/>
           </a:p>
@@ -896,7 +898,7 @@
           <a:p>
             <a:fld id="{5BCAD085-E8A6-8845-BD4E-CB4CCA059FC4}" type="datetimeFigureOut">
               <a:rPr lang="en-US" smtClean="0"/>
-              <a:t>10/17/2026</a:t>
+              <a:t>10/21/2026</a:t>
             </a:fld>
             <a:endParaRPr lang="en-US"/>
           </a:p>
@@ -1175,7 +1177,7 @@
           <a:p>
             <a:fld id="{5BCAD085-E8A6-8845-BD4E-CB4CCA059FC4}" type="datetimeFigureOut">
               <a:rPr lang="en-US" smtClean="0"/>
-              <a:t>10/17/2026</a:t>
+              <a:t>10/21/2026</a:t>
             </a:fld>
             <a:endParaRPr lang="en-US"/>
           </a:p>
@@ -1443,7 +1445,7 @@
           <a:p>
             <a:fld id="{5BCAD085-E8A6-8845-BD4E-CB4CCA059FC4}" type="datetimeFigureOut">
               <a:rPr lang="en-US" smtClean="0"/>
-              <a:t>10/17/2026</a:t>
+              <a:t>10/21/2026</a:t>
             </a:fld>
             <a:endParaRPr lang="en-US"/>
           </a:p>
@@ -1859,7 +1861,7 @@
           <a:p>
             <a:fld id="{5BCAD085-E8A6-8845-BD4E-CB4CCA059FC4}" type="datetimeFigureOut">
               <a:rPr lang="en-US" smtClean="0"/>
-              <a:t>10/17/2026</a:t>
+              <a:t>10/21/2026</a:t>
             </a:fld>
             <a:endParaRPr lang="en-US"/>
           </a:p>
@@ -2008,7 +2010,7 @@
           <a:p>
             <a:fld id="{5BCAD085-E8A6-8845-BD4E-CB4CCA059FC4}" type="datetimeFigureOut">
               <a:rPr lang="en-US" smtClean="0"/>
-              <a:t>10/17/2026</a:t>
+              <a:t>10/21/2026</a:t>
             </a:fld>
             <a:endParaRPr lang="en-US"/>
           </a:p>
@@ -2134,7 +2136,7 @@
           <a:p>
             <a:fld id="{5BCAD085-E8A6-8845-BD4E-CB4CCA059FC4}" type="datetimeFigureOut">
               <a:rPr lang="en-US" smtClean="0"/>
-              <a:t>10/17/2026</a:t>
+              <a:t>10/21/2026</a:t>
             </a:fld>
             <a:endParaRPr lang="en-US"/>
           </a:p>
@@ -2385,7 +2387,7 @@
           <a:p>
             <a:fld id="{5BCAD085-E8A6-8845-BD4E-CB4CCA059FC4}" type="datetimeFigureOut">
               <a:rPr lang="en-US" smtClean="0"/>
-              <a:t>10/17/2026</a:t>
+              <a:t>10/21/2026</a:t>
             </a:fld>
             <a:endParaRPr lang="en-US"/>
           </a:p>
@@ -2830,7 +2832,7 @@
           <a:p>
             <a:fld id="{5BCAD085-E8A6-8845-BD4E-CB4CCA059FC4}" type="datetimeFigureOut">
               <a:rPr lang="en-US" smtClean="0"/>
-              <a:t>10/17/2026</a:t>
+              <a:t>10/21/2026</a:t>
             </a:fld>
             <a:endParaRPr lang="en-US"/>
           </a:p>
@@ -3156,7 +3158,7 @@
           <a:p>
             <a:fld id="{5BCAD085-E8A6-8845-BD4E-CB4CCA059FC4}" type="datetimeFigureOut">
               <a:rPr lang="en-US" smtClean="0"/>
-              <a:t>10/17/2026</a:t>
+              <a:t>10/21/2026</a:t>
             </a:fld>
             <a:endParaRPr lang="en-US"/>
           </a:p>
@@ -3958,6 +3960,278 @@
 </p:sld>
 </file>
 
+<file path=ppt/slides/slide10.xml><?xml version="1.0" encoding="utf-8"?>
+<p:sld xmlns:a="http://schemas.openxmlformats.org/drawingml/2006/main" xmlns:r="http://schemas.openxmlformats.org/officeDocument/2006/relationships" xmlns:p="http://schemas.openxmlformats.org/presentationml/2006/main">
+  <p:cSld>
+    <p:bg>
+      <p:bgPr>
+        <a:solidFill>
+          <a:srgbClr val="FFFFFF"/>
+        </a:solidFill>
+        <a:effectLst/>
+      </p:bgPr>
+    </p:bg>
+    <p:spTree>
+      <p:nvGrpSpPr>
+        <p:cNvPr id="1" name=""/>
+        <p:cNvGrpSpPr/>
+        <p:nvPr/>
+      </p:nvGrpSpPr>
+      <p:grpSpPr>
+        <a:xfrm>
+          <a:off x="0" y="0"/>
+          <a:ext cx="0" cy="0"/>
+          <a:chOff x="0" y="0"/>
+          <a:chExt cx="0" cy="0"/>
+        </a:xfrm>
+      </p:grpSpPr>
+      <p:sp>
+        <p:nvSpPr>
+          <p:cNvPr id="2" name="TextBox 1"/>
+          <p:cNvSpPr txBox="1"/>
+          <p:nvPr/>
+        </p:nvSpPr>
+        <p:spPr>
+          <a:xfrm>
+            <a:off x="594360" y="320040"/>
+            <a:ext cx="10972800" cy="594360"/>
+          </a:xfrm>
+          <a:prstGeom prst="rect">
+            <a:avLst/>
+          </a:prstGeom>
+          <a:noFill/>
+        </p:spPr>
+        <p:txBody>
+          <a:bodyPr wrap="none">
+            <a:spAutoFit/>
+          </a:bodyPr>
+          <a:lstStyle/>
+          <a:p>
+            <a:pPr>
+              <a:defRPr sz="2800" b="1">
+                <a:solidFill>
+                  <a:srgbClr val="142D4E"/>
+                </a:solidFill>
+                <a:latin typeface="Aptos Display"/>
+              </a:defRPr>
+            </a:pPr>
+            <a:r>
+              <a:t>Conclusion</a:t>
+            </a:r>
+          </a:p>
+        </p:txBody>
+      </p:sp>
+      <p:sp>
+        <p:nvSpPr>
+          <p:cNvPr id="3" name="TextBox 2"/>
+          <p:cNvSpPr txBox="1"/>
+          <p:nvPr/>
+        </p:nvSpPr>
+        <p:spPr>
+          <a:xfrm>
+            <a:off x="621792" y="941832"/>
+            <a:ext cx="10972800" cy="365760"/>
+          </a:xfrm>
+          <a:prstGeom prst="rect">
+            <a:avLst/>
+          </a:prstGeom>
+          <a:noFill/>
+        </p:spPr>
+        <p:txBody>
+          <a:bodyPr wrap="none">
+            <a:spAutoFit/>
+          </a:bodyPr>
+          <a:lstStyle/>
+          <a:p>
+            <a:pPr>
+              <a:defRPr sz="1200">
+                <a:solidFill>
+                  <a:srgbClr val="5A6573"/>
+                </a:solidFill>
+                <a:latin typeface="Aptos"/>
+              </a:defRPr>
+            </a:pPr>
+            <a:r>
+              <a:t>Key takeaways</a:t>
+            </a:r>
+          </a:p>
+        </p:txBody>
+      </p:sp>
+      <p:sp>
+        <p:nvSpPr>
+          <p:cNvPr id="4" name="TextBox 3"/>
+          <p:cNvSpPr txBox="1"/>
+          <p:nvPr/>
+        </p:nvSpPr>
+        <p:spPr>
+          <a:xfrm>
+            <a:off x="777240" y="1417320"/>
+            <a:ext cx="10607040" cy="4480560"/>
+          </a:xfrm>
+          <a:prstGeom prst="rect">
+            <a:avLst/>
+          </a:prstGeom>
+          <a:noFill/>
+        </p:spPr>
+        <p:txBody>
+          <a:bodyPr wrap="square" lIns="73152" rIns="73152">
+            <a:spAutoFit/>
+          </a:bodyPr>
+          <a:lstStyle/>
+          <a:p>
+            <a:pPr>
+              <a:spcAft>
+                <a:spcPts val="1300"/>
+              </a:spcAft>
+              <a:defRPr sz="2000">
+                <a:solidFill>
+                  <a:srgbClr val="142D4E"/>
+                </a:solidFill>
+                <a:latin typeface="Aptos"/>
+              </a:defRPr>
+            </a:pPr>
+            <a:r>
+              <a:t>Cortex Search retrieves relevant passages; an LLM uses that context to generate natural-language answers.</a:t>
+            </a:r>
+          </a:p>
+          <a:p>
+            <a:pPr>
+              <a:spcAft>
+                <a:spcPts val="1300"/>
+              </a:spcAft>
+              <a:defRPr sz="2000">
+                <a:solidFill>
+                  <a:srgbClr val="142D4E"/>
+                </a:solidFill>
+                <a:latin typeface="Aptos"/>
+              </a:defRPr>
+            </a:pPr>
+            <a:r>
+              <a:t>The Streamlit interface lets users ask questions and view responses.</a:t>
+            </a:r>
+          </a:p>
+          <a:p>
+            <a:pPr>
+              <a:spcAft>
+                <a:spcPts val="1300"/>
+              </a:spcAft>
+              <a:defRPr sz="2000">
+                <a:solidFill>
+                  <a:srgbClr val="142D4E"/>
+                </a:solidFill>
+                <a:latin typeface="Aptos"/>
+              </a:defRPr>
+            </a:pPr>
+            <a:r>
+              <a:t>The Leave Management application supports configured leave-related questions and public-holiday queries, with access governed by the configured roles.</a:t>
+            </a:r>
+          </a:p>
+          <a:p>
+            <a:pPr>
+              <a:spcAft>
+                <a:spcPts val="1300"/>
+              </a:spcAft>
+              <a:defRPr sz="2000">
+                <a:solidFill>
+                  <a:srgbClr val="142D4E"/>
+                </a:solidFill>
+                <a:latin typeface="Aptos"/>
+              </a:defRPr>
+            </a:pPr>
+            <a:r>
+              <a:t>Validation completed: sample questions were tested, and the application is working as expected for the configured scenarios.</a:t>
+            </a:r>
+          </a:p>
+        </p:txBody>
+      </p:sp>
+      <p:sp>
+        <p:nvSpPr>
+          <p:cNvPr id="5" name="Rectangle 4"/>
+          <p:cNvSpPr/>
+          <p:nvPr/>
+        </p:nvSpPr>
+        <p:spPr>
+          <a:xfrm>
+            <a:off x="594360" y="6510528"/>
+            <a:ext cx="10972800" cy="18288"/>
+          </a:xfrm>
+          <a:prstGeom prst="rect">
+            <a:avLst/>
+          </a:prstGeom>
+          <a:solidFill>
+            <a:srgbClr val="E1EEFA"/>
+          </a:solidFill>
+          <a:ln>
+            <a:noFill/>
+          </a:ln>
+        </p:spPr>
+        <p:style>
+          <a:lnRef idx="1">
+            <a:schemeClr val="accent1"/>
+          </a:lnRef>
+          <a:fillRef idx="3">
+            <a:schemeClr val="accent1"/>
+          </a:fillRef>
+          <a:effectRef idx="2">
+            <a:schemeClr val="accent1"/>
+          </a:effectRef>
+          <a:fontRef idx="minor">
+            <a:schemeClr val="lt1"/>
+          </a:fontRef>
+        </p:style>
+        <p:txBody>
+          <a:bodyPr rtlCol="0" anchor="ctr"/>
+          <a:lstStyle/>
+          <a:p>
+            <a:pPr algn="ctr"/>
+            <a:endParaRPr/>
+          </a:p>
+        </p:txBody>
+      </p:sp>
+      <p:sp>
+        <p:nvSpPr>
+          <p:cNvPr id="6" name="TextBox 5"/>
+          <p:cNvSpPr txBox="1"/>
+          <p:nvPr/>
+        </p:nvSpPr>
+        <p:spPr>
+          <a:xfrm>
+            <a:off x="621792" y="6565392"/>
+            <a:ext cx="10789920" cy="164592"/>
+          </a:xfrm>
+          <a:prstGeom prst="rect">
+            <a:avLst/>
+          </a:prstGeom>
+          <a:noFill/>
+        </p:spPr>
+        <p:txBody>
+          <a:bodyPr wrap="none">
+            <a:spAutoFit/>
+          </a:bodyPr>
+          <a:lstStyle/>
+          <a:p>
+            <a:pPr>
+              <a:defRPr sz="800">
+                <a:solidFill>
+                  <a:srgbClr val="5A6573"/>
+                </a:solidFill>
+                <a:latin typeface="Aptos"/>
+              </a:defRPr>
+            </a:pPr>
+            <a:r>
+              <a:t>Snowflake Cortex Search RAG Application  |  9</a:t>
+            </a:r>
+          </a:p>
+        </p:txBody>
+      </p:sp>
+    </p:spTree>
+  </p:cSld>
+  <p:clrMapOvr>
+    <a:masterClrMapping/>
+  </p:clrMapOvr>
+</p:sld>
+</file>
+
 <file path=ppt/slides/slide2.xml><?xml version="1.0" encoding="utf-8"?>
 <p:sld xmlns:a="http://schemas.openxmlformats.org/drawingml/2006/main" xmlns:r="http://schemas.openxmlformats.org/officeDocument/2006/relationships" xmlns:p="http://schemas.openxmlformats.org/presentationml/2006/main">
   <p:cSld>
@@ -6508,6 +6782,7 @@
               </a:defRPr>
             </a:pPr>
             <a:r>
+              <a:rPr dirty="0"/>
               <a:t>Example</a:t>
             </a:r>
           </a:p>
@@ -6521,10 +6796,14 @@
               </a:defRPr>
             </a:pPr>
             <a:r>
+              <a:rPr dirty="0"/>
               <a:t>Question: “Show me my remaining leave balance and upcoming public holidays.”</a:t>
             </a:r>
-            <a:br/>
-            <a:r>
+            <a:br>
+              <a:rPr dirty="0"/>
+            </a:br>
+            <a:r>
+              <a:rPr dirty="0"/>
               <a:t>Answer: “Your leave balance and upcoming public holidays are listed below…” followed by the relevant details from the configured project data.</a:t>
             </a:r>
           </a:p>
@@ -6674,6 +6953,7 @@
               </a:defRPr>
             </a:pPr>
             <a:r>
+              <a:rPr dirty="0"/>
               <a:t>5. Evaluation / Metrics</a:t>
             </a:r>
           </a:p>
@@ -6980,6 +7260,833 @@
 </file>
 
 <file path=ppt/slides/slide7.xml><?xml version="1.0" encoding="utf-8"?>
+<p:sld xmlns:a="http://schemas.openxmlformats.org/drawingml/2006/main" xmlns:r="http://schemas.openxmlformats.org/officeDocument/2006/relationships" xmlns:p="http://schemas.openxmlformats.org/presentationml/2006/main">
+  <p:cSld>
+    <p:bg>
+      <p:bgPr>
+        <a:solidFill>
+          <a:srgbClr val="FFFFFF"/>
+        </a:solidFill>
+        <a:effectLst/>
+      </p:bgPr>
+    </p:bg>
+    <p:spTree>
+      <p:nvGrpSpPr>
+        <p:cNvPr id="1" name="">
+          <a:extLst>
+            <a:ext uri="{FF2B5EF4-FFF2-40B4-BE49-F238E27FC236}">
+              <a16:creationId xmlns:a16="http://schemas.microsoft.com/office/drawing/2014/main" id="{BB20B4E2-2AD9-C9AC-6650-A7BBB63FCC26}"/>
+            </a:ext>
+          </a:extLst>
+        </p:cNvPr>
+        <p:cNvGrpSpPr/>
+        <p:nvPr/>
+      </p:nvGrpSpPr>
+      <p:grpSpPr>
+        <a:xfrm>
+          <a:off x="0" y="0"/>
+          <a:ext cx="0" cy="0"/>
+          <a:chOff x="0" y="0"/>
+          <a:chExt cx="0" cy="0"/>
+        </a:xfrm>
+      </p:grpSpPr>
+      <p:sp>
+        <p:nvSpPr>
+          <p:cNvPr id="2" name="TextBox 1">
+            <a:extLst>
+              <a:ext uri="{FF2B5EF4-FFF2-40B4-BE49-F238E27FC236}">
+                <a16:creationId xmlns:a16="http://schemas.microsoft.com/office/drawing/2014/main" id="{29C3551E-DB96-E1A7-876A-AED14CE38EC8}"/>
+              </a:ext>
+            </a:extLst>
+          </p:cNvPr>
+          <p:cNvSpPr txBox="1"/>
+          <p:nvPr/>
+        </p:nvSpPr>
+        <p:spPr>
+          <a:xfrm>
+            <a:off x="594360" y="320040"/>
+            <a:ext cx="3826560" cy="523220"/>
+          </a:xfrm>
+          <a:prstGeom prst="rect">
+            <a:avLst/>
+          </a:prstGeom>
+          <a:noFill/>
+        </p:spPr>
+        <p:txBody>
+          <a:bodyPr wrap="none">
+            <a:spAutoFit/>
+          </a:bodyPr>
+          <a:lstStyle/>
+          <a:p>
+            <a:pPr>
+              <a:defRPr sz="2800" b="1">
+                <a:solidFill>
+                  <a:srgbClr val="142D4E"/>
+                </a:solidFill>
+                <a:latin typeface="Aptos Display"/>
+              </a:defRPr>
+            </a:pPr>
+            <a:r>
+              <a:rPr lang="en-GB" dirty="0"/>
+              <a:t>Input and output results</a:t>
+            </a:r>
+            <a:endParaRPr dirty="0"/>
+          </a:p>
+        </p:txBody>
+      </p:sp>
+      <p:sp>
+        <p:nvSpPr>
+          <p:cNvPr id="6" name="Rectangle 5">
+            <a:extLst>
+              <a:ext uri="{FF2B5EF4-FFF2-40B4-BE49-F238E27FC236}">
+                <a16:creationId xmlns:a16="http://schemas.microsoft.com/office/drawing/2014/main" id="{E4F52182-92FE-BB8E-A8E8-5C513FD8E81A}"/>
+              </a:ext>
+            </a:extLst>
+          </p:cNvPr>
+          <p:cNvSpPr/>
+          <p:nvPr/>
+        </p:nvSpPr>
+        <p:spPr>
+          <a:xfrm>
+            <a:off x="594360" y="6510528"/>
+            <a:ext cx="10972800" cy="18288"/>
+          </a:xfrm>
+          <a:prstGeom prst="rect">
+            <a:avLst/>
+          </a:prstGeom>
+          <a:solidFill>
+            <a:srgbClr val="E1EEFA"/>
+          </a:solidFill>
+          <a:ln>
+            <a:noFill/>
+          </a:ln>
+        </p:spPr>
+        <p:style>
+          <a:lnRef idx="1">
+            <a:schemeClr val="accent1"/>
+          </a:lnRef>
+          <a:fillRef idx="3">
+            <a:schemeClr val="accent1"/>
+          </a:fillRef>
+          <a:effectRef idx="2">
+            <a:schemeClr val="accent1"/>
+          </a:effectRef>
+          <a:fontRef idx="minor">
+            <a:schemeClr val="lt1"/>
+          </a:fontRef>
+        </p:style>
+        <p:txBody>
+          <a:bodyPr rtlCol="0" anchor="ctr"/>
+          <a:lstStyle/>
+          <a:p>
+            <a:pPr algn="ctr"/>
+            <a:endParaRPr/>
+          </a:p>
+        </p:txBody>
+      </p:sp>
+      <p:sp>
+        <p:nvSpPr>
+          <p:cNvPr id="7" name="TextBox 6">
+            <a:extLst>
+              <a:ext uri="{FF2B5EF4-FFF2-40B4-BE49-F238E27FC236}">
+                <a16:creationId xmlns:a16="http://schemas.microsoft.com/office/drawing/2014/main" id="{FA788C02-07AC-9C4E-5B39-2C13ADAAA2A2}"/>
+              </a:ext>
+            </a:extLst>
+          </p:cNvPr>
+          <p:cNvSpPr txBox="1"/>
+          <p:nvPr/>
+        </p:nvSpPr>
+        <p:spPr>
+          <a:xfrm>
+            <a:off x="621792" y="6565392"/>
+            <a:ext cx="10789920" cy="164592"/>
+          </a:xfrm>
+          <a:prstGeom prst="rect">
+            <a:avLst/>
+          </a:prstGeom>
+          <a:noFill/>
+        </p:spPr>
+        <p:txBody>
+          <a:bodyPr wrap="none">
+            <a:spAutoFit/>
+          </a:bodyPr>
+          <a:lstStyle/>
+          <a:p>
+            <a:pPr>
+              <a:defRPr sz="800">
+                <a:solidFill>
+                  <a:srgbClr val="5A6573"/>
+                </a:solidFill>
+                <a:latin typeface="Aptos"/>
+              </a:defRPr>
+            </a:pPr>
+            <a:r>
+              <a:t>Snowflake Cortex Search RAG Application  |  6</a:t>
+            </a:r>
+          </a:p>
+        </p:txBody>
+      </p:sp>
+      <p:pic>
+        <p:nvPicPr>
+          <p:cNvPr id="9" name="Picture 8">
+            <a:extLst>
+              <a:ext uri="{FF2B5EF4-FFF2-40B4-BE49-F238E27FC236}">
+                <a16:creationId xmlns:a16="http://schemas.microsoft.com/office/drawing/2014/main" id="{2201DD49-DFEF-2D4D-8F17-265C8A4C1A17}"/>
+              </a:ext>
+            </a:extLst>
+          </p:cNvPr>
+          <p:cNvPicPr>
+            <a:picLocks noChangeAspect="1"/>
+          </p:cNvPicPr>
+          <p:nvPr/>
+        </p:nvPicPr>
+        <p:blipFill>
+          <a:blip r:embed="rId2"/>
+          <a:srcRect t="10464"/>
+          <a:stretch>
+            <a:fillRect/>
+          </a:stretch>
+        </p:blipFill>
+        <p:spPr>
+          <a:xfrm>
+            <a:off x="277057" y="843260"/>
+            <a:ext cx="5654530" cy="3357768"/>
+          </a:xfrm>
+          <a:prstGeom prst="rect">
+            <a:avLst/>
+          </a:prstGeom>
+        </p:spPr>
+      </p:pic>
+      <p:pic>
+        <p:nvPicPr>
+          <p:cNvPr id="11" name="Picture 10">
+            <a:extLst>
+              <a:ext uri="{FF2B5EF4-FFF2-40B4-BE49-F238E27FC236}">
+                <a16:creationId xmlns:a16="http://schemas.microsoft.com/office/drawing/2014/main" id="{3A825D86-89F2-3F00-F640-6DDB93B1ED8D}"/>
+              </a:ext>
+            </a:extLst>
+          </p:cNvPr>
+          <p:cNvPicPr>
+            <a:picLocks noChangeAspect="1"/>
+          </p:cNvPicPr>
+          <p:nvPr/>
+        </p:nvPicPr>
+        <p:blipFill>
+          <a:blip r:embed="rId3"/>
+          <a:stretch>
+            <a:fillRect/>
+          </a:stretch>
+        </p:blipFill>
+        <p:spPr>
+          <a:xfrm>
+            <a:off x="6080760" y="952288"/>
+            <a:ext cx="5753599" cy="3139712"/>
+          </a:xfrm>
+          <a:prstGeom prst="rect">
+            <a:avLst/>
+          </a:prstGeom>
+        </p:spPr>
+      </p:pic>
+      <p:sp>
+        <p:nvSpPr>
+          <p:cNvPr id="13" name="Rounded Rectangle 6">
+            <a:extLst>
+              <a:ext uri="{FF2B5EF4-FFF2-40B4-BE49-F238E27FC236}">
+                <a16:creationId xmlns:a16="http://schemas.microsoft.com/office/drawing/2014/main" id="{0CC95B62-235A-94AC-D3C2-938AB2C599F7}"/>
+              </a:ext>
+            </a:extLst>
+          </p:cNvPr>
+          <p:cNvSpPr/>
+          <p:nvPr/>
+        </p:nvSpPr>
+        <p:spPr>
+          <a:xfrm>
+            <a:off x="119270" y="4640580"/>
+            <a:ext cx="5526156" cy="1173692"/>
+          </a:xfrm>
+          <a:prstGeom prst="roundRect">
+            <a:avLst/>
+          </a:prstGeom>
+          <a:solidFill>
+            <a:srgbClr val="F3F6F9"/>
+          </a:solidFill>
+          <a:ln>
+            <a:solidFill>
+              <a:srgbClr val="F3F6F9"/>
+            </a:solidFill>
+          </a:ln>
+        </p:spPr>
+        <p:style>
+          <a:lnRef idx="1">
+            <a:schemeClr val="accent1"/>
+          </a:lnRef>
+          <a:fillRef idx="3">
+            <a:schemeClr val="accent1"/>
+          </a:fillRef>
+          <a:effectRef idx="2">
+            <a:schemeClr val="accent1"/>
+          </a:effectRef>
+          <a:fontRef idx="minor">
+            <a:schemeClr val="lt1"/>
+          </a:fontRef>
+        </p:style>
+        <p:txBody>
+          <a:bodyPr lIns="146304" tIns="109728" rIns="146304" bIns="73152" rtlCol="0" anchor="ctr"/>
+          <a:lstStyle/>
+          <a:p>
+            <a:pPr algn="ctr">
+              <a:spcAft>
+                <a:spcPts val="600"/>
+              </a:spcAft>
+              <a:defRPr sz="1700" b="1">
+                <a:solidFill>
+                  <a:srgbClr val="142D4E"/>
+                </a:solidFill>
+                <a:latin typeface="Aptos"/>
+              </a:defRPr>
+            </a:pPr>
+            <a:r>
+              <a:rPr dirty="0"/>
+              <a:t>Example</a:t>
+            </a:r>
+          </a:p>
+          <a:p>
+            <a:pPr>
+              <a:defRPr sz="1200">
+                <a:solidFill>
+                  <a:srgbClr val="142D4E"/>
+                </a:solidFill>
+                <a:latin typeface="Aptos"/>
+              </a:defRPr>
+            </a:pPr>
+            <a:r>
+              <a:rPr dirty="0"/>
+              <a:t>Question: </a:t>
+            </a:r>
+            <a:r>
+              <a:rPr lang="en-GB" dirty="0"/>
+              <a:t>Requester with incorrect email address trying to access chatbot</a:t>
+            </a:r>
+            <a:br>
+              <a:rPr dirty="0"/>
+            </a:br>
+            <a:r>
+              <a:rPr dirty="0"/>
+              <a:t>Answer: </a:t>
+            </a:r>
+            <a:r>
+              <a:rPr lang="en-GB" dirty="0"/>
+              <a:t>chatbot gives error that only employees of </a:t>
+            </a:r>
+            <a:r>
+              <a:rPr lang="en-GB" dirty="0" err="1"/>
+              <a:t>abc</a:t>
+            </a:r>
+            <a:r>
+              <a:rPr lang="en-GB" dirty="0"/>
+              <a:t> company can access</a:t>
+            </a:r>
+            <a:endParaRPr dirty="0"/>
+          </a:p>
+        </p:txBody>
+      </p:sp>
+      <p:sp>
+        <p:nvSpPr>
+          <p:cNvPr id="14" name="Rounded Rectangle 6">
+            <a:extLst>
+              <a:ext uri="{FF2B5EF4-FFF2-40B4-BE49-F238E27FC236}">
+                <a16:creationId xmlns:a16="http://schemas.microsoft.com/office/drawing/2014/main" id="{93D95C8A-656C-256D-9CF6-BA03597275AD}"/>
+              </a:ext>
+            </a:extLst>
+          </p:cNvPr>
+          <p:cNvSpPr/>
+          <p:nvPr/>
+        </p:nvSpPr>
+        <p:spPr>
+          <a:xfrm>
+            <a:off x="5799716" y="4693436"/>
+            <a:ext cx="5965069" cy="1041441"/>
+          </a:xfrm>
+          <a:prstGeom prst="roundRect">
+            <a:avLst/>
+          </a:prstGeom>
+          <a:solidFill>
+            <a:srgbClr val="F3F6F9"/>
+          </a:solidFill>
+          <a:ln>
+            <a:solidFill>
+              <a:srgbClr val="F3F6F9"/>
+            </a:solidFill>
+          </a:ln>
+        </p:spPr>
+        <p:style>
+          <a:lnRef idx="1">
+            <a:schemeClr val="accent1"/>
+          </a:lnRef>
+          <a:fillRef idx="3">
+            <a:schemeClr val="accent1"/>
+          </a:fillRef>
+          <a:effectRef idx="2">
+            <a:schemeClr val="accent1"/>
+          </a:effectRef>
+          <a:fontRef idx="minor">
+            <a:schemeClr val="lt1"/>
+          </a:fontRef>
+        </p:style>
+        <p:txBody>
+          <a:bodyPr lIns="146304" tIns="109728" rIns="146304" bIns="73152" rtlCol="0" anchor="ctr"/>
+          <a:lstStyle/>
+          <a:p>
+            <a:pPr algn="ctr">
+              <a:spcAft>
+                <a:spcPts val="600"/>
+              </a:spcAft>
+              <a:defRPr sz="1700" b="1">
+                <a:solidFill>
+                  <a:srgbClr val="142D4E"/>
+                </a:solidFill>
+                <a:latin typeface="Aptos"/>
+              </a:defRPr>
+            </a:pPr>
+            <a:r>
+              <a:rPr dirty="0"/>
+              <a:t>Example</a:t>
+            </a:r>
+          </a:p>
+          <a:p>
+            <a:pPr>
+              <a:defRPr sz="1200">
+                <a:solidFill>
+                  <a:srgbClr val="142D4E"/>
+                </a:solidFill>
+                <a:latin typeface="Aptos"/>
+              </a:defRPr>
+            </a:pPr>
+            <a:r>
+              <a:rPr lang="en-GB" dirty="0"/>
+              <a:t>After employee successful logged in chat bot gives employee details like name, department and manager details. Additional we have added 5 models that user can select for querying their request</a:t>
+            </a:r>
+            <a:endParaRPr dirty="0"/>
+          </a:p>
+        </p:txBody>
+      </p:sp>
+    </p:spTree>
+    <p:extLst>
+      <p:ext uri="{BB962C8B-B14F-4D97-AF65-F5344CB8AC3E}">
+        <p14:creationId xmlns:p14="http://schemas.microsoft.com/office/powerpoint/2010/main" val="4116084978"/>
+      </p:ext>
+    </p:extLst>
+  </p:cSld>
+  <p:clrMapOvr>
+    <a:masterClrMapping/>
+  </p:clrMapOvr>
+</p:sld>
+</file>
+
+<file path=ppt/slides/slide8.xml><?xml version="1.0" encoding="utf-8"?>
+<p:sld xmlns:a="http://schemas.openxmlformats.org/drawingml/2006/main" xmlns:r="http://schemas.openxmlformats.org/officeDocument/2006/relationships" xmlns:p="http://schemas.openxmlformats.org/presentationml/2006/main">
+  <p:cSld>
+    <p:bg>
+      <p:bgPr>
+        <a:solidFill>
+          <a:srgbClr val="FFFFFF"/>
+        </a:solidFill>
+        <a:effectLst/>
+      </p:bgPr>
+    </p:bg>
+    <p:spTree>
+      <p:nvGrpSpPr>
+        <p:cNvPr id="1" name="">
+          <a:extLst>
+            <a:ext uri="{FF2B5EF4-FFF2-40B4-BE49-F238E27FC236}">
+              <a16:creationId xmlns:a16="http://schemas.microsoft.com/office/drawing/2014/main" id="{86C34CD7-B9A4-8F64-18C4-AC6A82FF3898}"/>
+            </a:ext>
+          </a:extLst>
+        </p:cNvPr>
+        <p:cNvGrpSpPr/>
+        <p:nvPr/>
+      </p:nvGrpSpPr>
+      <p:grpSpPr>
+        <a:xfrm>
+          <a:off x="0" y="0"/>
+          <a:ext cx="0" cy="0"/>
+          <a:chOff x="0" y="0"/>
+          <a:chExt cx="0" cy="0"/>
+        </a:xfrm>
+      </p:grpSpPr>
+      <p:sp>
+        <p:nvSpPr>
+          <p:cNvPr id="2" name="TextBox 1">
+            <a:extLst>
+              <a:ext uri="{FF2B5EF4-FFF2-40B4-BE49-F238E27FC236}">
+                <a16:creationId xmlns:a16="http://schemas.microsoft.com/office/drawing/2014/main" id="{40FB0CC4-6F2C-1E3C-2628-C67F2E7787CA}"/>
+              </a:ext>
+            </a:extLst>
+          </p:cNvPr>
+          <p:cNvSpPr txBox="1"/>
+          <p:nvPr/>
+        </p:nvSpPr>
+        <p:spPr>
+          <a:xfrm>
+            <a:off x="198531" y="9018"/>
+            <a:ext cx="4870426" cy="523220"/>
+          </a:xfrm>
+          <a:prstGeom prst="rect">
+            <a:avLst/>
+          </a:prstGeom>
+          <a:noFill/>
+        </p:spPr>
+        <p:txBody>
+          <a:bodyPr wrap="square">
+            <a:spAutoFit/>
+          </a:bodyPr>
+          <a:lstStyle/>
+          <a:p>
+            <a:pPr>
+              <a:defRPr sz="2800" b="1">
+                <a:solidFill>
+                  <a:srgbClr val="142D4E"/>
+                </a:solidFill>
+                <a:latin typeface="Aptos Display"/>
+              </a:defRPr>
+            </a:pPr>
+            <a:r>
+              <a:rPr lang="en-GB" dirty="0"/>
+              <a:t>Input and output results</a:t>
+            </a:r>
+            <a:endParaRPr dirty="0"/>
+          </a:p>
+        </p:txBody>
+      </p:sp>
+      <p:sp>
+        <p:nvSpPr>
+          <p:cNvPr id="6" name="Rectangle 5">
+            <a:extLst>
+              <a:ext uri="{FF2B5EF4-FFF2-40B4-BE49-F238E27FC236}">
+                <a16:creationId xmlns:a16="http://schemas.microsoft.com/office/drawing/2014/main" id="{ED5010F6-BAF1-8CA1-F8FF-57D4FC875BE9}"/>
+              </a:ext>
+            </a:extLst>
+          </p:cNvPr>
+          <p:cNvSpPr/>
+          <p:nvPr/>
+        </p:nvSpPr>
+        <p:spPr>
+          <a:xfrm>
+            <a:off x="594360" y="6510528"/>
+            <a:ext cx="10972800" cy="18288"/>
+          </a:xfrm>
+          <a:prstGeom prst="rect">
+            <a:avLst/>
+          </a:prstGeom>
+          <a:solidFill>
+            <a:srgbClr val="E1EEFA"/>
+          </a:solidFill>
+          <a:ln>
+            <a:noFill/>
+          </a:ln>
+        </p:spPr>
+        <p:style>
+          <a:lnRef idx="1">
+            <a:schemeClr val="accent1"/>
+          </a:lnRef>
+          <a:fillRef idx="3">
+            <a:schemeClr val="accent1"/>
+          </a:fillRef>
+          <a:effectRef idx="2">
+            <a:schemeClr val="accent1"/>
+          </a:effectRef>
+          <a:fontRef idx="minor">
+            <a:schemeClr val="lt1"/>
+          </a:fontRef>
+        </p:style>
+        <p:txBody>
+          <a:bodyPr rtlCol="0" anchor="ctr"/>
+          <a:lstStyle/>
+          <a:p>
+            <a:pPr algn="ctr"/>
+            <a:endParaRPr/>
+          </a:p>
+        </p:txBody>
+      </p:sp>
+      <p:sp>
+        <p:nvSpPr>
+          <p:cNvPr id="7" name="TextBox 6">
+            <a:extLst>
+              <a:ext uri="{FF2B5EF4-FFF2-40B4-BE49-F238E27FC236}">
+                <a16:creationId xmlns:a16="http://schemas.microsoft.com/office/drawing/2014/main" id="{FEE349FE-D0EC-C889-D3F9-1564AEA9570F}"/>
+              </a:ext>
+            </a:extLst>
+          </p:cNvPr>
+          <p:cNvSpPr txBox="1"/>
+          <p:nvPr/>
+        </p:nvSpPr>
+        <p:spPr>
+          <a:xfrm>
+            <a:off x="621792" y="6565392"/>
+            <a:ext cx="10789920" cy="164592"/>
+          </a:xfrm>
+          <a:prstGeom prst="rect">
+            <a:avLst/>
+          </a:prstGeom>
+          <a:noFill/>
+        </p:spPr>
+        <p:txBody>
+          <a:bodyPr wrap="none">
+            <a:spAutoFit/>
+          </a:bodyPr>
+          <a:lstStyle/>
+          <a:p>
+            <a:pPr>
+              <a:defRPr sz="800">
+                <a:solidFill>
+                  <a:srgbClr val="5A6573"/>
+                </a:solidFill>
+                <a:latin typeface="Aptos"/>
+              </a:defRPr>
+            </a:pPr>
+            <a:r>
+              <a:t>Snowflake Cortex Search RAG Application  |  6</a:t>
+            </a:r>
+          </a:p>
+        </p:txBody>
+      </p:sp>
+      <p:sp>
+        <p:nvSpPr>
+          <p:cNvPr id="13" name="Rounded Rectangle 6">
+            <a:extLst>
+              <a:ext uri="{FF2B5EF4-FFF2-40B4-BE49-F238E27FC236}">
+                <a16:creationId xmlns:a16="http://schemas.microsoft.com/office/drawing/2014/main" id="{436A53B2-A4B2-801D-B274-A5DB7AA94DA0}"/>
+              </a:ext>
+            </a:extLst>
+          </p:cNvPr>
+          <p:cNvSpPr/>
+          <p:nvPr/>
+        </p:nvSpPr>
+        <p:spPr>
+          <a:xfrm>
+            <a:off x="0" y="4853189"/>
+            <a:ext cx="5526156" cy="1173692"/>
+          </a:xfrm>
+          <a:prstGeom prst="roundRect">
+            <a:avLst/>
+          </a:prstGeom>
+          <a:solidFill>
+            <a:srgbClr val="F3F6F9"/>
+          </a:solidFill>
+          <a:ln>
+            <a:solidFill>
+              <a:srgbClr val="F3F6F9"/>
+            </a:solidFill>
+          </a:ln>
+        </p:spPr>
+        <p:style>
+          <a:lnRef idx="1">
+            <a:schemeClr val="accent1"/>
+          </a:lnRef>
+          <a:fillRef idx="3">
+            <a:schemeClr val="accent1"/>
+          </a:fillRef>
+          <a:effectRef idx="2">
+            <a:schemeClr val="accent1"/>
+          </a:effectRef>
+          <a:fontRef idx="minor">
+            <a:schemeClr val="lt1"/>
+          </a:fontRef>
+        </p:style>
+        <p:txBody>
+          <a:bodyPr lIns="146304" tIns="109728" rIns="146304" bIns="73152" rtlCol="0" anchor="ctr"/>
+          <a:lstStyle/>
+          <a:p>
+            <a:pPr algn="ctr">
+              <a:spcAft>
+                <a:spcPts val="600"/>
+              </a:spcAft>
+              <a:defRPr sz="1700" b="1">
+                <a:solidFill>
+                  <a:srgbClr val="142D4E"/>
+                </a:solidFill>
+                <a:latin typeface="Aptos"/>
+              </a:defRPr>
+            </a:pPr>
+            <a:r>
+              <a:rPr dirty="0"/>
+              <a:t>Example</a:t>
+            </a:r>
+          </a:p>
+          <a:p>
+            <a:pPr>
+              <a:defRPr sz="1200">
+                <a:solidFill>
+                  <a:srgbClr val="142D4E"/>
+                </a:solidFill>
+                <a:latin typeface="Aptos"/>
+              </a:defRPr>
+            </a:pPr>
+            <a:r>
+              <a:rPr dirty="0"/>
+              <a:t>Question: </a:t>
+            </a:r>
+            <a:r>
+              <a:rPr lang="en-GB" dirty="0"/>
+              <a:t>Employee can ask about their leave summary details and pending available leave details</a:t>
+            </a:r>
+          </a:p>
+        </p:txBody>
+      </p:sp>
+      <p:sp>
+        <p:nvSpPr>
+          <p:cNvPr id="14" name="Rounded Rectangle 6">
+            <a:extLst>
+              <a:ext uri="{FF2B5EF4-FFF2-40B4-BE49-F238E27FC236}">
+                <a16:creationId xmlns:a16="http://schemas.microsoft.com/office/drawing/2014/main" id="{DDDEF765-EE0B-91A8-AA41-554C1E1B4EEA}"/>
+              </a:ext>
+            </a:extLst>
+          </p:cNvPr>
+          <p:cNvSpPr/>
+          <p:nvPr/>
+        </p:nvSpPr>
+        <p:spPr>
+          <a:xfrm>
+            <a:off x="5726200" y="5341497"/>
+            <a:ext cx="5840960" cy="581240"/>
+          </a:xfrm>
+          <a:prstGeom prst="roundRect">
+            <a:avLst/>
+          </a:prstGeom>
+          <a:solidFill>
+            <a:srgbClr val="F3F6F9"/>
+          </a:solidFill>
+          <a:ln>
+            <a:solidFill>
+              <a:srgbClr val="F3F6F9"/>
+            </a:solidFill>
+          </a:ln>
+        </p:spPr>
+        <p:style>
+          <a:lnRef idx="1">
+            <a:schemeClr val="accent1"/>
+          </a:lnRef>
+          <a:fillRef idx="3">
+            <a:schemeClr val="accent1"/>
+          </a:fillRef>
+          <a:effectRef idx="2">
+            <a:schemeClr val="accent1"/>
+          </a:effectRef>
+          <a:fontRef idx="minor">
+            <a:schemeClr val="lt1"/>
+          </a:fontRef>
+        </p:style>
+        <p:txBody>
+          <a:bodyPr lIns="146304" tIns="109728" rIns="146304" bIns="73152" rtlCol="0" anchor="ctr"/>
+          <a:lstStyle/>
+          <a:p>
+            <a:pPr algn="ctr">
+              <a:spcAft>
+                <a:spcPts val="600"/>
+              </a:spcAft>
+              <a:defRPr sz="1700" b="1">
+                <a:solidFill>
+                  <a:srgbClr val="142D4E"/>
+                </a:solidFill>
+                <a:latin typeface="Aptos"/>
+              </a:defRPr>
+            </a:pPr>
+            <a:r>
+              <a:rPr dirty="0"/>
+              <a:t>Example</a:t>
+            </a:r>
+          </a:p>
+          <a:p>
+            <a:pPr>
+              <a:defRPr sz="1200">
+                <a:solidFill>
+                  <a:srgbClr val="142D4E"/>
+                </a:solidFill>
+                <a:latin typeface="Aptos"/>
+              </a:defRPr>
+            </a:pPr>
+            <a:r>
+              <a:rPr lang="en-GB" dirty="0"/>
+              <a:t>Question: User can also request their public holidays details.</a:t>
+            </a:r>
+            <a:endParaRPr dirty="0"/>
+          </a:p>
+        </p:txBody>
+      </p:sp>
+      <p:pic>
+        <p:nvPicPr>
+          <p:cNvPr id="4" name="Picture 3">
+            <a:extLst>
+              <a:ext uri="{FF2B5EF4-FFF2-40B4-BE49-F238E27FC236}">
+                <a16:creationId xmlns:a16="http://schemas.microsoft.com/office/drawing/2014/main" id="{973118D3-9D55-4924-AC7C-8D20E7591A4F}"/>
+              </a:ext>
+            </a:extLst>
+          </p:cNvPr>
+          <p:cNvPicPr>
+            <a:picLocks noChangeAspect="1"/>
+          </p:cNvPicPr>
+          <p:nvPr/>
+        </p:nvPicPr>
+        <p:blipFill>
+          <a:blip r:embed="rId2"/>
+          <a:stretch>
+            <a:fillRect/>
+          </a:stretch>
+        </p:blipFill>
+        <p:spPr>
+          <a:xfrm>
+            <a:off x="-35020" y="452453"/>
+            <a:ext cx="5665792" cy="4544147"/>
+          </a:xfrm>
+          <a:prstGeom prst="rect">
+            <a:avLst/>
+          </a:prstGeom>
+        </p:spPr>
+      </p:pic>
+      <p:pic>
+        <p:nvPicPr>
+          <p:cNvPr id="8" name="Picture 7">
+            <a:extLst>
+              <a:ext uri="{FF2B5EF4-FFF2-40B4-BE49-F238E27FC236}">
+                <a16:creationId xmlns:a16="http://schemas.microsoft.com/office/drawing/2014/main" id="{29F61DB2-E42E-3548-8F85-36C8AE8A48FE}"/>
+              </a:ext>
+            </a:extLst>
+          </p:cNvPr>
+          <p:cNvPicPr>
+            <a:picLocks noChangeAspect="1"/>
+          </p:cNvPicPr>
+          <p:nvPr/>
+        </p:nvPicPr>
+        <p:blipFill>
+          <a:blip r:embed="rId3"/>
+          <a:stretch>
+            <a:fillRect/>
+          </a:stretch>
+        </p:blipFill>
+        <p:spPr>
+          <a:xfrm>
+            <a:off x="5904332" y="9018"/>
+            <a:ext cx="5608806" cy="5161812"/>
+          </a:xfrm>
+          <a:prstGeom prst="rect">
+            <a:avLst/>
+          </a:prstGeom>
+        </p:spPr>
+      </p:pic>
+    </p:spTree>
+    <p:extLst>
+      <p:ext uri="{BB962C8B-B14F-4D97-AF65-F5344CB8AC3E}">
+        <p14:creationId xmlns:p14="http://schemas.microsoft.com/office/powerpoint/2010/main" val="787146193"/>
+      </p:ext>
+    </p:extLst>
+  </p:cSld>
+  <p:clrMapOvr>
+    <a:masterClrMapping/>
+  </p:clrMapOvr>
+</p:sld>
+</file>
+
+<file path=ppt/slides/slide9.xml><?xml version="1.0" encoding="utf-8"?>
 <p:sld xmlns:a="http://schemas.openxmlformats.org/drawingml/2006/main" xmlns:r="http://schemas.openxmlformats.org/officeDocument/2006/relationships" xmlns:p="http://schemas.openxmlformats.org/presentationml/2006/main">
   <p:cSld>
     <p:bg>
@@ -7255,278 +8362,6 @@
             </a:pPr>
             <a:r>
               <a:t>Snowflake Cortex Search RAG Application  |  7</a:t>
-            </a:r>
-          </a:p>
-        </p:txBody>
-      </p:sp>
-    </p:spTree>
-  </p:cSld>
-  <p:clrMapOvr>
-    <a:masterClrMapping/>
-  </p:clrMapOvr>
-</p:sld>
-</file>
-
-<file path=ppt/slides/slide8.xml><?xml version="1.0" encoding="utf-8"?>
-<p:sld xmlns:a="http://schemas.openxmlformats.org/drawingml/2006/main" xmlns:r="http://schemas.openxmlformats.org/officeDocument/2006/relationships" xmlns:p="http://schemas.openxmlformats.org/presentationml/2006/main">
-  <p:cSld>
-    <p:bg>
-      <p:bgPr>
-        <a:solidFill>
-          <a:srgbClr val="FFFFFF"/>
-        </a:solidFill>
-        <a:effectLst/>
-      </p:bgPr>
-    </p:bg>
-    <p:spTree>
-      <p:nvGrpSpPr>
-        <p:cNvPr id="1" name=""/>
-        <p:cNvGrpSpPr/>
-        <p:nvPr/>
-      </p:nvGrpSpPr>
-      <p:grpSpPr>
-        <a:xfrm>
-          <a:off x="0" y="0"/>
-          <a:ext cx="0" cy="0"/>
-          <a:chOff x="0" y="0"/>
-          <a:chExt cx="0" cy="0"/>
-        </a:xfrm>
-      </p:grpSpPr>
-      <p:sp>
-        <p:nvSpPr>
-          <p:cNvPr id="2" name="TextBox 1"/>
-          <p:cNvSpPr txBox="1"/>
-          <p:nvPr/>
-        </p:nvSpPr>
-        <p:spPr>
-          <a:xfrm>
-            <a:off x="594360" y="320040"/>
-            <a:ext cx="10972800" cy="594360"/>
-          </a:xfrm>
-          <a:prstGeom prst="rect">
-            <a:avLst/>
-          </a:prstGeom>
-          <a:noFill/>
-        </p:spPr>
-        <p:txBody>
-          <a:bodyPr wrap="none">
-            <a:spAutoFit/>
-          </a:bodyPr>
-          <a:lstStyle/>
-          <a:p>
-            <a:pPr>
-              <a:defRPr sz="2800" b="1">
-                <a:solidFill>
-                  <a:srgbClr val="142D4E"/>
-                </a:solidFill>
-                <a:latin typeface="Aptos Display"/>
-              </a:defRPr>
-            </a:pPr>
-            <a:r>
-              <a:t>Conclusion</a:t>
-            </a:r>
-          </a:p>
-        </p:txBody>
-      </p:sp>
-      <p:sp>
-        <p:nvSpPr>
-          <p:cNvPr id="3" name="TextBox 2"/>
-          <p:cNvSpPr txBox="1"/>
-          <p:nvPr/>
-        </p:nvSpPr>
-        <p:spPr>
-          <a:xfrm>
-            <a:off x="621792" y="941832"/>
-            <a:ext cx="10972800" cy="365760"/>
-          </a:xfrm>
-          <a:prstGeom prst="rect">
-            <a:avLst/>
-          </a:prstGeom>
-          <a:noFill/>
-        </p:spPr>
-        <p:txBody>
-          <a:bodyPr wrap="none">
-            <a:spAutoFit/>
-          </a:bodyPr>
-          <a:lstStyle/>
-          <a:p>
-            <a:pPr>
-              <a:defRPr sz="1200">
-                <a:solidFill>
-                  <a:srgbClr val="5A6573"/>
-                </a:solidFill>
-                <a:latin typeface="Aptos"/>
-              </a:defRPr>
-            </a:pPr>
-            <a:r>
-              <a:t>Key takeaways</a:t>
-            </a:r>
-          </a:p>
-        </p:txBody>
-      </p:sp>
-      <p:sp>
-        <p:nvSpPr>
-          <p:cNvPr id="4" name="TextBox 3"/>
-          <p:cNvSpPr txBox="1"/>
-          <p:nvPr/>
-        </p:nvSpPr>
-        <p:spPr>
-          <a:xfrm>
-            <a:off x="777240" y="1417320"/>
-            <a:ext cx="10607040" cy="4480560"/>
-          </a:xfrm>
-          <a:prstGeom prst="rect">
-            <a:avLst/>
-          </a:prstGeom>
-          <a:noFill/>
-        </p:spPr>
-        <p:txBody>
-          <a:bodyPr wrap="square" lIns="73152" rIns="73152">
-            <a:spAutoFit/>
-          </a:bodyPr>
-          <a:lstStyle/>
-          <a:p>
-            <a:pPr>
-              <a:spcAft>
-                <a:spcPts val="1300"/>
-              </a:spcAft>
-              <a:defRPr sz="2000">
-                <a:solidFill>
-                  <a:srgbClr val="142D4E"/>
-                </a:solidFill>
-                <a:latin typeface="Aptos"/>
-              </a:defRPr>
-            </a:pPr>
-            <a:r>
-              <a:t>Cortex Search retrieves relevant passages; an LLM uses that context to generate natural-language answers.</a:t>
-            </a:r>
-          </a:p>
-          <a:p>
-            <a:pPr>
-              <a:spcAft>
-                <a:spcPts val="1300"/>
-              </a:spcAft>
-              <a:defRPr sz="2000">
-                <a:solidFill>
-                  <a:srgbClr val="142D4E"/>
-                </a:solidFill>
-                <a:latin typeface="Aptos"/>
-              </a:defRPr>
-            </a:pPr>
-            <a:r>
-              <a:t>The Streamlit interface lets users ask questions and view responses.</a:t>
-            </a:r>
-          </a:p>
-          <a:p>
-            <a:pPr>
-              <a:spcAft>
-                <a:spcPts val="1300"/>
-              </a:spcAft>
-              <a:defRPr sz="2000">
-                <a:solidFill>
-                  <a:srgbClr val="142D4E"/>
-                </a:solidFill>
-                <a:latin typeface="Aptos"/>
-              </a:defRPr>
-            </a:pPr>
-            <a:r>
-              <a:t>The Leave Management application supports configured leave-related questions and public-holiday queries, with access governed by the configured roles.</a:t>
-            </a:r>
-          </a:p>
-          <a:p>
-            <a:pPr>
-              <a:spcAft>
-                <a:spcPts val="1300"/>
-              </a:spcAft>
-              <a:defRPr sz="2000">
-                <a:solidFill>
-                  <a:srgbClr val="142D4E"/>
-                </a:solidFill>
-                <a:latin typeface="Aptos"/>
-              </a:defRPr>
-            </a:pPr>
-            <a:r>
-              <a:t>Validation completed: sample questions were tested, and the application is working as expected for the configured scenarios.</a:t>
-            </a:r>
-          </a:p>
-        </p:txBody>
-      </p:sp>
-      <p:sp>
-        <p:nvSpPr>
-          <p:cNvPr id="5" name="Rectangle 4"/>
-          <p:cNvSpPr/>
-          <p:nvPr/>
-        </p:nvSpPr>
-        <p:spPr>
-          <a:xfrm>
-            <a:off x="594360" y="6510528"/>
-            <a:ext cx="10972800" cy="18288"/>
-          </a:xfrm>
-          <a:prstGeom prst="rect">
-            <a:avLst/>
-          </a:prstGeom>
-          <a:solidFill>
-            <a:srgbClr val="E1EEFA"/>
-          </a:solidFill>
-          <a:ln>
-            <a:noFill/>
-          </a:ln>
-        </p:spPr>
-        <p:style>
-          <a:lnRef idx="1">
-            <a:schemeClr val="accent1"/>
-          </a:lnRef>
-          <a:fillRef idx="3">
-            <a:schemeClr val="accent1"/>
-          </a:fillRef>
-          <a:effectRef idx="2">
-            <a:schemeClr val="accent1"/>
-          </a:effectRef>
-          <a:fontRef idx="minor">
-            <a:schemeClr val="lt1"/>
-          </a:fontRef>
-        </p:style>
-        <p:txBody>
-          <a:bodyPr rtlCol="0" anchor="ctr"/>
-          <a:lstStyle/>
-          <a:p>
-            <a:pPr algn="ctr"/>
-            <a:endParaRPr/>
-          </a:p>
-        </p:txBody>
-      </p:sp>
-      <p:sp>
-        <p:nvSpPr>
-          <p:cNvPr id="6" name="TextBox 5"/>
-          <p:cNvSpPr txBox="1"/>
-          <p:nvPr/>
-        </p:nvSpPr>
-        <p:spPr>
-          <a:xfrm>
-            <a:off x="621792" y="6565392"/>
-            <a:ext cx="10789920" cy="164592"/>
-          </a:xfrm>
-          <a:prstGeom prst="rect">
-            <a:avLst/>
-          </a:prstGeom>
-          <a:noFill/>
-        </p:spPr>
-        <p:txBody>
-          <a:bodyPr wrap="none">
-            <a:spAutoFit/>
-          </a:bodyPr>
-          <a:lstStyle/>
-          <a:p>
-            <a:pPr>
-              <a:defRPr sz="800">
-                <a:solidFill>
-                  <a:srgbClr val="5A6573"/>
-                </a:solidFill>
-                <a:latin typeface="Aptos"/>
-              </a:defRPr>
-            </a:pPr>
-            <a:r>
-              <a:t>Snowflake Cortex Search RAG Application  |  9</a:t>
             </a:r>
           </a:p>
         </p:txBody>
